--- a/dataset/guides_final/ACS/manual/IT-ACS-002-M_개발·검증 서버 접근권한 처리 매뉴얼.pptx
+++ b/dataset/guides_final/ACS/manual/IT-ACS-002-M_개발·검증 서버 접근권한 처리 매뉴얼.pptx
@@ -22484,7 +22484,7 @@
                 <a:ea typeface="Malgun Gothic"/>
                 <a:cs typeface="Malgun Gothic"/>
               </a:rPr>
-              <a:t>티켓: 담당자 조치가 필요한 건. 담당 팀에 배정하고 상태를 RDY → IP → FIN → CLS 로 관리한다. FIN은 담당자 처리 완료, CLS는 문의자가 해결을 확인한 최종</a:t>
+              <a:t>티켓: 담당자 조치가 필요한 건. 담당 팀에 배정하고 상태를 RDY → WIP → FIN → CLS 로 관리한다. FIN은 담당자 처리 완료, CLS는 문의자가 해결을 확인한 최종</a:t>
             </a:r>
           </a:p>
           <a:p>

--- a/dataset/guides_final/ACS/manual/IT-ACS-002-M_개발·검증 서버 접근권한 처리 매뉴얼.pptx
+++ b/dataset/guides_final/ACS/manual/IT-ACS-002-M_개발·검증 서버 접근권한 처리 매뉴얼.pptx
@@ -3233,7 +3233,7 @@
                 <a:ea typeface="Malgun Gothic"/>
                 <a:cs typeface="Malgun Gothic"/>
               </a:rPr>
-              <a:t>한화시스템 ICT IT 담당자 매뉴얼 · 접근권한</a:t>
+              <a:t>가상 ICT 기업 IT 담당자 매뉴얼 · 접근권한</a:t>
             </a:r>
           </a:p>
         </p:txBody>
@@ -3512,7 +3512,7 @@
                 <a:ea typeface="Malgun Gothic"/>
                 <a:cs typeface="Malgun Gothic"/>
               </a:rPr>
-              <a:t>© HANWHA SYSTEMS ICT · IT-ACS-002-M · 사내 제한</a:t>
+              <a:t>© 가상 ICT 기업 · IT-ACS-002-M · 사내 제한</a:t>
             </a:r>
           </a:p>
         </p:txBody>
@@ -4617,7 +4617,7 @@
                 <a:ea typeface="Malgun Gothic"/>
                 <a:cs typeface="Malgun Gothic"/>
               </a:rPr>
-              <a:t>© HANWHA SYSTEMS ICT · IT-ACS-002-M · 사내 제한</a:t>
+              <a:t>© 가상 ICT 기업 · IT-ACS-002-M · 사내 제한</a:t>
             </a:r>
           </a:p>
         </p:txBody>
@@ -7603,7 +7603,7 @@
                 <a:ea typeface="Malgun Gothic"/>
                 <a:cs typeface="Malgun Gothic"/>
               </a:rPr>
-              <a:t>© HANWHA SYSTEMS ICT · IT-ACS-002-M · 사내 제한</a:t>
+              <a:t>© 가상 ICT 기업 · IT-ACS-002-M · 사내 제한</a:t>
             </a:r>
           </a:p>
         </p:txBody>
@@ -10253,7 +10253,7 @@
                 <a:ea typeface="Malgun Gothic"/>
                 <a:cs typeface="Malgun Gothic"/>
               </a:rPr>
-              <a:t>© HANWHA SYSTEMS ICT · IT-ACS-002-M · 사내 제한</a:t>
+              <a:t>© 가상 ICT 기업 · IT-ACS-002-M · 사내 제한</a:t>
             </a:r>
           </a:p>
         </p:txBody>
@@ -11316,7 +11316,7 @@
                 <a:ea typeface="Malgun Gothic"/>
                 <a:cs typeface="Malgun Gothic"/>
               </a:rPr>
-              <a:t>© HANWHA SYSTEMS ICT · IT-ACS-002-M · 사내 제한</a:t>
+              <a:t>© 가상 ICT 기업 · IT-ACS-002-M · 사내 제한</a:t>
             </a:r>
           </a:p>
         </p:txBody>
@@ -11564,7 +11564,7 @@
                 <a:ea typeface="Malgun Gothic"/>
                 <a:cs typeface="Malgun Gothic"/>
               </a:rPr>
-              <a:t>© HANWHA SYSTEMS ICT · IT-ACS-002-M · 사내 제한</a:t>
+              <a:t>© 가상 ICT 기업 · IT-ACS-002-M · 사내 제한</a:t>
             </a:r>
           </a:p>
         </p:txBody>
@@ -12223,7 +12223,7 @@
                 <a:ea typeface="Malgun Gothic"/>
                 <a:cs typeface="Malgun Gothic"/>
               </a:rPr>
-              <a:t>© HANWHA SYSTEMS ICT · IT-ACS-002-M · 사내 제한</a:t>
+              <a:t>© 가상 ICT 기업 · IT-ACS-002-M · 사내 제한</a:t>
             </a:r>
           </a:p>
         </p:txBody>
@@ -12471,7 +12471,7 @@
                 <a:ea typeface="Malgun Gothic"/>
                 <a:cs typeface="Malgun Gothic"/>
               </a:rPr>
-              <a:t>© HANWHA SYSTEMS ICT · IT-ACS-002-M · 사내 제한</a:t>
+              <a:t>© 가상 ICT 기업 · IT-ACS-002-M · 사내 제한</a:t>
             </a:r>
           </a:p>
         </p:txBody>
@@ -13499,7 +13499,7 @@
                 <a:ea typeface="Malgun Gothic"/>
                 <a:cs typeface="Malgun Gothic"/>
               </a:rPr>
-              <a:t>© HANWHA SYSTEMS ICT · IT-ACS-002-M · 사내 제한</a:t>
+              <a:t>© 가상 ICT 기업 · IT-ACS-002-M · 사내 제한</a:t>
             </a:r>
           </a:p>
         </p:txBody>
@@ -13747,7 +13747,7 @@
                 <a:ea typeface="Malgun Gothic"/>
                 <a:cs typeface="Malgun Gothic"/>
               </a:rPr>
-              <a:t>© HANWHA SYSTEMS ICT · IT-ACS-002-M · 사내 제한</a:t>
+              <a:t>© 가상 ICT 기업 · IT-ACS-002-M · 사내 제한</a:t>
             </a:r>
           </a:p>
         </p:txBody>
@@ -15226,7 +15226,7 @@
                 <a:ea typeface="Malgun Gothic"/>
                 <a:cs typeface="Malgun Gothic"/>
               </a:rPr>
-              <a:t>© HANWHA SYSTEMS ICT · IT-ACS-002-M · 사내 제한</a:t>
+              <a:t>© 가상 ICT 기업 · IT-ACS-002-M · 사내 제한</a:t>
             </a:r>
           </a:p>
         </p:txBody>
@@ -16869,7 +16869,7 @@
                 <a:ea typeface="Malgun Gothic"/>
                 <a:cs typeface="Malgun Gothic"/>
               </a:rPr>
-              <a:t>© HANWHA SYSTEMS ICT · IT-ACS-002-M · 사내 제한</a:t>
+              <a:t>© 가상 ICT 기업 · IT-ACS-002-M · 사내 제한</a:t>
             </a:r>
           </a:p>
         </p:txBody>
@@ -17799,7 +17799,7 @@
                 <a:ea typeface="Malgun Gothic"/>
                 <a:cs typeface="Malgun Gothic"/>
               </a:rPr>
-              <a:t>© HANWHA SYSTEMS ICT · IT-ACS-002-M · 사내 제한</a:t>
+              <a:t>© 가상 ICT 기업 · IT-ACS-002-M · 사내 제한</a:t>
             </a:r>
           </a:p>
         </p:txBody>
@@ -18945,7 +18945,7 @@
                 <a:ea typeface="Malgun Gothic"/>
                 <a:cs typeface="Malgun Gothic"/>
               </a:rPr>
-              <a:t>© HANWHA SYSTEMS ICT · IT-ACS-002-M · 사내 제한</a:t>
+              <a:t>© 가상 ICT 기업 · IT-ACS-002-M · 사내 제한</a:t>
             </a:r>
           </a:p>
         </p:txBody>
@@ -19193,7 +19193,7 @@
                 <a:ea typeface="Malgun Gothic"/>
                 <a:cs typeface="Malgun Gothic"/>
               </a:rPr>
-              <a:t>© HANWHA SYSTEMS ICT · IT-ACS-002-M · 사내 제한</a:t>
+              <a:t>© 가상 ICT 기업 · IT-ACS-002-M · 사내 제한</a:t>
             </a:r>
           </a:p>
         </p:txBody>
@@ -20115,7 +20115,7 @@
                 <a:ea typeface="Malgun Gothic"/>
                 <a:cs typeface="Malgun Gothic"/>
               </a:rPr>
-              <a:t>© HANWHA SYSTEMS ICT · IT-ACS-002-M · 사내 제한</a:t>
+              <a:t>© 가상 ICT 기업 · IT-ACS-002-M · 사내 제한</a:t>
             </a:r>
           </a:p>
         </p:txBody>
@@ -20363,7 +20363,7 @@
                 <a:ea typeface="Malgun Gothic"/>
                 <a:cs typeface="Malgun Gothic"/>
               </a:rPr>
-              <a:t>© HANWHA SYSTEMS ICT · IT-ACS-002-M · 사내 제한</a:t>
+              <a:t>© 가상 ICT 기업 · IT-ACS-002-M · 사내 제한</a:t>
             </a:r>
           </a:p>
         </p:txBody>
@@ -22790,7 +22790,7 @@
                 <a:ea typeface="Malgun Gothic"/>
                 <a:cs typeface="Malgun Gothic"/>
               </a:rPr>
-              <a:t>© HANWHA SYSTEMS ICT · IT-ACS-002-M · 사내 제한</a:t>
+              <a:t>© 가상 ICT 기업 · IT-ACS-002-M · 사내 제한</a:t>
             </a:r>
           </a:p>
         </p:txBody>
@@ -23038,7 +23038,7 @@
                 <a:ea typeface="Malgun Gothic"/>
                 <a:cs typeface="Malgun Gothic"/>
               </a:rPr>
-              <a:t>© HANWHA SYSTEMS ICT · IT-ACS-002-M · 사내 제한</a:t>
+              <a:t>© 가상 ICT 기업 · IT-ACS-002-M · 사내 제한</a:t>
             </a:r>
           </a:p>
         </p:txBody>
@@ -26047,7 +26047,7 @@
                 <a:ea typeface="Malgun Gothic"/>
                 <a:cs typeface="Malgun Gothic"/>
               </a:rPr>
-              <a:t>© HANWHA SYSTEMS ICT · IT-ACS-002-M · 사내 제한</a:t>
+              <a:t>© 가상 ICT 기업 · IT-ACS-002-M · 사내 제한</a:t>
             </a:r>
           </a:p>
         </p:txBody>
